--- a/docs/The Look · Recompra a 60 días.pptx
+++ b/docs/The Look · Recompra a 60 días.pptx
@@ -5610,7 +5610,7 @@
         </p:nvSpPr>
         <p:spPr>
           <a:xfrm>
-            <a:off x="815975" y="3331687"/>
+            <a:off x="1851673" y="3312635"/>
             <a:ext cx="2520950" cy="1116330"/>
           </a:xfrm>
           <a:prstGeom prst="roundRect">
@@ -5644,7 +5644,7 @@
         </p:nvSpPr>
         <p:spPr>
           <a:xfrm>
-            <a:off x="1021080" y="3536791"/>
+            <a:off x="2056778" y="3517739"/>
             <a:ext cx="2174062" cy="254000"/>
           </a:xfrm>
           <a:prstGeom prst="rect">
@@ -5688,7 +5688,7 @@
         </p:nvSpPr>
         <p:spPr>
           <a:xfrm>
-            <a:off x="1021080" y="3816191"/>
+            <a:off x="2056778" y="3797139"/>
             <a:ext cx="2174062" cy="238760"/>
           </a:xfrm>
           <a:prstGeom prst="rect">
@@ -5732,7 +5732,7 @@
         </p:nvSpPr>
         <p:spPr>
           <a:xfrm>
-            <a:off x="3495675" y="3331687"/>
+            <a:off x="4531373" y="3312635"/>
             <a:ext cx="2520950" cy="1116330"/>
           </a:xfrm>
           <a:prstGeom prst="roundRect">
@@ -5766,7 +5766,7 @@
         </p:nvSpPr>
         <p:spPr>
           <a:xfrm>
-            <a:off x="3700780" y="3536791"/>
+            <a:off x="4736478" y="3517739"/>
             <a:ext cx="2174062" cy="254000"/>
           </a:xfrm>
           <a:prstGeom prst="rect">
@@ -5810,7 +5810,7 @@
         </p:nvSpPr>
         <p:spPr>
           <a:xfrm>
-            <a:off x="3700780" y="3816191"/>
+            <a:off x="4736478" y="3797139"/>
             <a:ext cx="2174062" cy="452120"/>
           </a:xfrm>
           <a:prstGeom prst="rect">
@@ -5854,7 +5854,7 @@
         </p:nvSpPr>
         <p:spPr>
           <a:xfrm>
-            <a:off x="6175375" y="3331687"/>
+            <a:off x="7211073" y="3312635"/>
             <a:ext cx="2520950" cy="1116330"/>
           </a:xfrm>
           <a:prstGeom prst="roundRect">
@@ -5888,7 +5888,7 @@
         </p:nvSpPr>
         <p:spPr>
           <a:xfrm>
-            <a:off x="6380480" y="3536791"/>
+            <a:off x="7416178" y="3517739"/>
             <a:ext cx="2174062" cy="254000"/>
           </a:xfrm>
           <a:prstGeom prst="rect">
@@ -5932,7 +5932,7 @@
         </p:nvSpPr>
         <p:spPr>
           <a:xfrm>
-            <a:off x="6380480" y="3816191"/>
+            <a:off x="7416178" y="3797139"/>
             <a:ext cx="2174062" cy="452120"/>
           </a:xfrm>
           <a:prstGeom prst="rect">
@@ -5963,128 +5963,6 @@
                 <a:cs typeface="IBM Plex Sans" pitchFamily="34" charset="-120"/>
               </a:rPr>
               <a:t>HistGradientBoosting y LightGBM</a:t>
-            </a:r>
-            <a:endParaRPr lang="en-US" sz="1200" dirty="0"/>
-          </a:p>
-        </p:txBody>
-      </p:sp>
-      <p:sp>
-        <p:nvSpPr>
-          <p:cNvPr id="25" name="Shape 23"/>
-          <p:cNvSpPr/>
-          <p:nvPr/>
-        </p:nvSpPr>
-        <p:spPr>
-          <a:xfrm>
-            <a:off x="8855075" y="3331687"/>
-            <a:ext cx="2520950" cy="1116330"/>
-          </a:xfrm>
-          <a:prstGeom prst="roundRect">
-            <a:avLst>
-              <a:gd name="adj" fmla="val 8817"/>
-            </a:avLst>
-          </a:prstGeom>
-          <a:solidFill>
-            <a:srgbClr val="FDFCF9"/>
-          </a:solidFill>
-          <a:ln w="6350">
-            <a:solidFill>
-              <a:srgbClr val="E3DFD5"/>
-            </a:solidFill>
-            <a:prstDash val="solid"/>
-          </a:ln>
-        </p:spPr>
-        <p:txBody>
-          <a:bodyPr/>
-          <a:lstStyle/>
-          <a:p>
-            <a:endParaRPr lang="es-PE"/>
-          </a:p>
-        </p:txBody>
-      </p:sp>
-      <p:sp>
-        <p:nvSpPr>
-          <p:cNvPr id="26" name="Text 24"/>
-          <p:cNvSpPr/>
-          <p:nvPr/>
-        </p:nvSpPr>
-        <p:spPr>
-          <a:xfrm>
-            <a:off x="9060180" y="3536791"/>
-            <a:ext cx="2174062" cy="254000"/>
-          </a:xfrm>
-          <a:prstGeom prst="rect">
-            <a:avLst/>
-          </a:prstGeom>
-          <a:noFill/>
-          <a:ln/>
-        </p:spPr>
-        <p:txBody>
-          <a:bodyPr wrap="square" lIns="0" tIns="0" rIns="0" bIns="0" rtlCol="0" anchor="t">
-            <a:normAutofit/>
-          </a:bodyPr>
-          <a:lstStyle/>
-          <a:p>
-            <a:pPr marL="0" indent="0" algn="l">
-              <a:lnSpc>
-                <a:spcPts val="1800"/>
-              </a:lnSpc>
-              <a:buNone/>
-            </a:pPr>
-            <a:r>
-              <a:rPr lang="en-US" sz="1500" b="1" dirty="0">
-                <a:solidFill>
-                  <a:srgbClr val="14213D"/>
-                </a:solidFill>
-                <a:latin typeface="IBM Plex Sans" pitchFamily="34" charset="0"/>
-                <a:ea typeface="IBM Plex Sans" pitchFamily="34" charset="-122"/>
-                <a:cs typeface="IBM Plex Sans" pitchFamily="34" charset="-120"/>
-              </a:rPr>
-              <a:t>Regla simple</a:t>
-            </a:r>
-            <a:endParaRPr lang="en-US" sz="1500" dirty="0"/>
-          </a:p>
-        </p:txBody>
-      </p:sp>
-      <p:sp>
-        <p:nvSpPr>
-          <p:cNvPr id="27" name="Text 25"/>
-          <p:cNvSpPr/>
-          <p:nvPr/>
-        </p:nvSpPr>
-        <p:spPr>
-          <a:xfrm>
-            <a:off x="9060180" y="3816191"/>
-            <a:ext cx="2174062" cy="452120"/>
-          </a:xfrm>
-          <a:prstGeom prst="rect">
-            <a:avLst/>
-          </a:prstGeom>
-          <a:noFill/>
-          <a:ln/>
-        </p:spPr>
-        <p:txBody>
-          <a:bodyPr wrap="square" lIns="0" tIns="0" rIns="0" bIns="0" rtlCol="0" anchor="t">
-            <a:normAutofit/>
-          </a:bodyPr>
-          <a:lstStyle/>
-          <a:p>
-            <a:pPr marL="0" indent="0" algn="l">
-              <a:lnSpc>
-                <a:spcPts val="1680"/>
-              </a:lnSpc>
-              <a:buNone/>
-            </a:pPr>
-            <a:r>
-              <a:rPr lang="en-US" sz="1200" dirty="0">
-                <a:solidFill>
-                  <a:srgbClr val="4A5568"/>
-                </a:solidFill>
-                <a:latin typeface="IBM Plex Sans" pitchFamily="34" charset="0"/>
-                <a:ea typeface="IBM Plex Sans" pitchFamily="34" charset="-122"/>
-                <a:cs typeface="IBM Plex Sans" pitchFamily="34" charset="-120"/>
-              </a:rPr>
-              <a:t>Ordena por días entre registro y 1.ª compra</a:t>
             </a:r>
             <a:endParaRPr lang="en-US" sz="1200" dirty="0"/>
           </a:p>
@@ -6400,28 +6278,28 @@
           <p:nvPr>
             <p:extLst>
               <p:ext uri="{D42A27DB-BD31-4B8C-83A1-F6EECF244321}">
-                <p14:modId xmlns:p14="http://schemas.microsoft.com/office/powerpoint/2010/main" val="1579011935"/>
+                <p14:modId xmlns:p14="http://schemas.microsoft.com/office/powerpoint/2010/main" val="2349596418"/>
               </p:ext>
             </p:extLst>
           </p:nvPr>
         </p:nvGraphicFramePr>
         <p:xfrm>
-          <a:off x="822960" y="1872456"/>
-          <a:ext cx="10556238" cy="2550160"/>
+          <a:off x="812800" y="2033587"/>
+          <a:ext cx="10556238" cy="2166620"/>
         </p:xfrm>
         <a:graphic>
           <a:graphicData uri="http://schemas.openxmlformats.org/drawingml/2006/table">
             <a:tbl>
               <a:tblPr/>
               <a:tblGrid>
-                <a:gridCol w="3800246">
+                <a:gridCol w="3301171">
                   <a:extLst>
                     <a:ext uri="{9D8B030D-6E8A-4147-A177-3AD203B41FA5}">
                       <a16:colId xmlns:a16="http://schemas.microsoft.com/office/drawing/2014/main" val="20000"/>
                     </a:ext>
                   </a:extLst>
                 </a:gridCol>
-                <a:gridCol w="1688998">
+                <a:gridCol w="2188073">
                   <a:extLst>
                     <a:ext uri="{9D8B030D-6E8A-4147-A177-3AD203B41FA5}">
                       <a16:colId xmlns:a16="http://schemas.microsoft.com/office/drawing/2014/main" val="20001"/>
@@ -6833,368 +6711,6 @@
                           <a:ea typeface="IBM Plex Sans" pitchFamily="34" charset="-122"/>
                           <a:cs typeface="IBM Plex Sans" pitchFamily="34" charset="-120"/>
                         </a:rPr>
-                        <a:t>Regla simple · elegida</a:t>
-                      </a:r>
-                      <a:endParaRPr lang="en-US" sz="1400" dirty="0">
-                        <a:latin typeface="IBM Plex Sans" charset="0"/>
-                        <a:ea typeface="IBM Plex Sans" charset="0"/>
-                        <a:cs typeface="IBM Plex Sans" charset="0"/>
-                      </a:endParaRPr>
-                    </a:p>
-                  </a:txBody>
-                  <a:tcPr marL="62230" marR="62230" marT="62230" marB="62230">
-                    <a:lnL w="12700" cap="flat" cmpd="sng" algn="ctr">
-                      <a:solidFill>
-                        <a:srgbClr val="C4C3BF"/>
-                      </a:solidFill>
-                      <a:prstDash val="solid"/>
-                      <a:round/>
-                      <a:headEnd type="none" w="med" len="med"/>
-                      <a:tailEnd type="none" w="med" len="med"/>
-                    </a:lnL>
-                    <a:lnR w="12700" cap="flat" cmpd="sng" algn="ctr">
-                      <a:solidFill>
-                        <a:srgbClr val="C8B8AE"/>
-                      </a:solidFill>
-                      <a:prstDash val="solid"/>
-                      <a:round/>
-                      <a:headEnd type="none" w="med" len="med"/>
-                      <a:tailEnd type="none" w="med" len="med"/>
-                    </a:lnR>
-                    <a:lnT w="12700" cap="flat" cmpd="sng" algn="ctr">
-                      <a:solidFill>
-                        <a:srgbClr val="B6B5B1"/>
-                      </a:solidFill>
-                      <a:prstDash val="solid"/>
-                      <a:round/>
-                      <a:headEnd type="none" w="med" len="med"/>
-                      <a:tailEnd type="none" w="med" len="med"/>
-                    </a:lnT>
-                    <a:lnB w="12700" cap="flat" cmpd="sng" algn="ctr">
-                      <a:solidFill>
-                        <a:srgbClr val="C8B8AE"/>
-                      </a:solidFill>
-                      <a:prstDash val="solid"/>
-                      <a:round/>
-                      <a:headEnd type="none" w="med" len="med"/>
-                      <a:tailEnd type="none" w="med" len="med"/>
-                    </a:lnB>
-                    <a:solidFill>
-                      <a:srgbClr val="FBE6DA"/>
-                    </a:solidFill>
-                  </a:tcPr>
-                </a:tc>
-                <a:tc>
-                  <a:txBody>
-                    <a:bodyPr/>
-                    <a:lstStyle/>
-                    <a:p>
-                      <a:pPr marL="0" indent="0" algn="r">
-                        <a:lnSpc>
-                          <a:spcPts val="1960"/>
-                        </a:lnSpc>
-                        <a:buNone/>
-                      </a:pPr>
-                      <a:r>
-                        <a:rPr lang="en-US" sz="1400" dirty="0">
-                          <a:solidFill>
-                            <a:srgbClr val="14213D"/>
-                          </a:solidFill>
-                          <a:latin typeface="IBM Plex Sans" pitchFamily="34" charset="0"/>
-                          <a:ea typeface="IBM Plex Sans" pitchFamily="34" charset="-122"/>
-                          <a:cs typeface="IBM Plex Sans" pitchFamily="34" charset="-120"/>
-                        </a:rPr>
-                        <a:t>0.270</a:t>
-                      </a:r>
-                      <a:endParaRPr lang="en-US" sz="1400" dirty="0">
-                        <a:latin typeface="IBM Plex Sans" charset="0"/>
-                        <a:ea typeface="IBM Plex Sans" charset="0"/>
-                        <a:cs typeface="IBM Plex Sans" charset="0"/>
-                      </a:endParaRPr>
-                    </a:p>
-                  </a:txBody>
-                  <a:tcPr marL="62230" marR="62230" marT="62230" marB="62230">
-                    <a:lnL w="12700" cap="flat" cmpd="sng" algn="ctr">
-                      <a:solidFill>
-                        <a:srgbClr val="C8B8AE"/>
-                      </a:solidFill>
-                      <a:prstDash val="solid"/>
-                      <a:round/>
-                      <a:headEnd type="none" w="med" len="med"/>
-                      <a:tailEnd type="none" w="med" len="med"/>
-                    </a:lnL>
-                    <a:lnR w="12700" cap="flat" cmpd="sng" algn="ctr">
-                      <a:solidFill>
-                        <a:srgbClr val="C8B8AE"/>
-                      </a:solidFill>
-                      <a:prstDash val="solid"/>
-                      <a:round/>
-                      <a:headEnd type="none" w="med" len="med"/>
-                      <a:tailEnd type="none" w="med" len="med"/>
-                    </a:lnR>
-                    <a:lnT w="12700" cap="flat" cmpd="sng" algn="ctr">
-                      <a:solidFill>
-                        <a:srgbClr val="B6B5B1"/>
-                      </a:solidFill>
-                      <a:prstDash val="solid"/>
-                      <a:round/>
-                      <a:headEnd type="none" w="med" len="med"/>
-                      <a:tailEnd type="none" w="med" len="med"/>
-                    </a:lnT>
-                    <a:lnB w="12700" cap="flat" cmpd="sng" algn="ctr">
-                      <a:solidFill>
-                        <a:srgbClr val="C8B8AE"/>
-                      </a:solidFill>
-                      <a:prstDash val="solid"/>
-                      <a:round/>
-                      <a:headEnd type="none" w="med" len="med"/>
-                      <a:tailEnd type="none" w="med" len="med"/>
-                    </a:lnB>
-                    <a:solidFill>
-                      <a:srgbClr val="FBE6DA"/>
-                    </a:solidFill>
-                  </a:tcPr>
-                </a:tc>
-                <a:tc>
-                  <a:txBody>
-                    <a:bodyPr/>
-                    <a:lstStyle/>
-                    <a:p>
-                      <a:pPr marL="0" indent="0" algn="r">
-                        <a:lnSpc>
-                          <a:spcPts val="1960"/>
-                        </a:lnSpc>
-                        <a:buNone/>
-                      </a:pPr>
-                      <a:r>
-                        <a:rPr lang="en-US" sz="1400" dirty="0">
-                          <a:solidFill>
-                            <a:srgbClr val="14213D"/>
-                          </a:solidFill>
-                          <a:latin typeface="IBM Plex Sans" pitchFamily="34" charset="0"/>
-                          <a:ea typeface="IBM Plex Sans" pitchFamily="34" charset="-122"/>
-                          <a:cs typeface="IBM Plex Sans" pitchFamily="34" charset="-120"/>
-                        </a:rPr>
-                        <a:t>32.1%</a:t>
-                      </a:r>
-                      <a:endParaRPr lang="en-US" sz="1400" dirty="0">
-                        <a:latin typeface="IBM Plex Sans" charset="0"/>
-                        <a:ea typeface="IBM Plex Sans" charset="0"/>
-                        <a:cs typeface="IBM Plex Sans" charset="0"/>
-                      </a:endParaRPr>
-                    </a:p>
-                  </a:txBody>
-                  <a:tcPr marL="62230" marR="62230" marT="62230" marB="62230">
-                    <a:lnL w="12700" cap="flat" cmpd="sng" algn="ctr">
-                      <a:solidFill>
-                        <a:srgbClr val="C8B8AE"/>
-                      </a:solidFill>
-                      <a:prstDash val="solid"/>
-                      <a:round/>
-                      <a:headEnd type="none" w="med" len="med"/>
-                      <a:tailEnd type="none" w="med" len="med"/>
-                    </a:lnL>
-                    <a:lnR w="12700" cap="flat" cmpd="sng" algn="ctr">
-                      <a:solidFill>
-                        <a:srgbClr val="C8B8AE"/>
-                      </a:solidFill>
-                      <a:prstDash val="solid"/>
-                      <a:round/>
-                      <a:headEnd type="none" w="med" len="med"/>
-                      <a:tailEnd type="none" w="med" len="med"/>
-                    </a:lnR>
-                    <a:lnT w="12700" cap="flat" cmpd="sng" algn="ctr">
-                      <a:solidFill>
-                        <a:srgbClr val="B6B5B1"/>
-                      </a:solidFill>
-                      <a:prstDash val="solid"/>
-                      <a:round/>
-                      <a:headEnd type="none" w="med" len="med"/>
-                      <a:tailEnd type="none" w="med" len="med"/>
-                    </a:lnT>
-                    <a:lnB w="12700" cap="flat" cmpd="sng" algn="ctr">
-                      <a:solidFill>
-                        <a:srgbClr val="C8B8AE"/>
-                      </a:solidFill>
-                      <a:prstDash val="solid"/>
-                      <a:round/>
-                      <a:headEnd type="none" w="med" len="med"/>
-                      <a:tailEnd type="none" w="med" len="med"/>
-                    </a:lnB>
-                    <a:solidFill>
-                      <a:srgbClr val="FBE6DA"/>
-                    </a:solidFill>
-                  </a:tcPr>
-                </a:tc>
-                <a:tc>
-                  <a:txBody>
-                    <a:bodyPr/>
-                    <a:lstStyle/>
-                    <a:p>
-                      <a:pPr marL="0" indent="0" algn="r">
-                        <a:lnSpc>
-                          <a:spcPts val="1960"/>
-                        </a:lnSpc>
-                        <a:buNone/>
-                      </a:pPr>
-                      <a:r>
-                        <a:rPr lang="en-US" sz="1400" dirty="0">
-                          <a:solidFill>
-                            <a:srgbClr val="14213D"/>
-                          </a:solidFill>
-                          <a:latin typeface="IBM Plex Sans" pitchFamily="34" charset="0"/>
-                          <a:ea typeface="IBM Plex Sans" pitchFamily="34" charset="-122"/>
-                          <a:cs typeface="IBM Plex Sans" pitchFamily="34" charset="-120"/>
-                        </a:rPr>
-                        <a:t>2.5×</a:t>
-                      </a:r>
-                      <a:endParaRPr lang="en-US" sz="1400" dirty="0">
-                        <a:latin typeface="IBM Plex Sans" charset="0"/>
-                        <a:ea typeface="IBM Plex Sans" charset="0"/>
-                        <a:cs typeface="IBM Plex Sans" charset="0"/>
-                      </a:endParaRPr>
-                    </a:p>
-                  </a:txBody>
-                  <a:tcPr marL="62230" marR="62230" marT="62230" marB="62230">
-                    <a:lnL w="12700" cap="flat" cmpd="sng" algn="ctr">
-                      <a:solidFill>
-                        <a:srgbClr val="C8B8AE"/>
-                      </a:solidFill>
-                      <a:prstDash val="solid"/>
-                      <a:round/>
-                      <a:headEnd type="none" w="med" len="med"/>
-                      <a:tailEnd type="none" w="med" len="med"/>
-                    </a:lnL>
-                    <a:lnR w="12700" cap="flat" cmpd="sng" algn="ctr">
-                      <a:solidFill>
-                        <a:srgbClr val="C8B8AE"/>
-                      </a:solidFill>
-                      <a:prstDash val="solid"/>
-                      <a:round/>
-                      <a:headEnd type="none" w="med" len="med"/>
-                      <a:tailEnd type="none" w="med" len="med"/>
-                    </a:lnR>
-                    <a:lnT w="12700" cap="flat" cmpd="sng" algn="ctr">
-                      <a:solidFill>
-                        <a:srgbClr val="B6B5B1"/>
-                      </a:solidFill>
-                      <a:prstDash val="solid"/>
-                      <a:round/>
-                      <a:headEnd type="none" w="med" len="med"/>
-                      <a:tailEnd type="none" w="med" len="med"/>
-                    </a:lnT>
-                    <a:lnB w="12700" cap="flat" cmpd="sng" algn="ctr">
-                      <a:solidFill>
-                        <a:srgbClr val="C8B8AE"/>
-                      </a:solidFill>
-                      <a:prstDash val="solid"/>
-                      <a:round/>
-                      <a:headEnd type="none" w="med" len="med"/>
-                      <a:tailEnd type="none" w="med" len="med"/>
-                    </a:lnB>
-                    <a:solidFill>
-                      <a:srgbClr val="FBE6DA"/>
-                    </a:solidFill>
-                  </a:tcPr>
-                </a:tc>
-                <a:tc>
-                  <a:txBody>
-                    <a:bodyPr/>
-                    <a:lstStyle/>
-                    <a:p>
-                      <a:pPr marL="0" indent="0" algn="r">
-                        <a:lnSpc>
-                          <a:spcPts val="1960"/>
-                        </a:lnSpc>
-                        <a:buNone/>
-                      </a:pPr>
-                      <a:r>
-                        <a:rPr lang="en-US" sz="1400" dirty="0">
-                          <a:solidFill>
-                            <a:srgbClr val="14213D"/>
-                          </a:solidFill>
-                          <a:latin typeface="IBM Plex Sans" pitchFamily="34" charset="0"/>
-                          <a:ea typeface="IBM Plex Sans" pitchFamily="34" charset="-122"/>
-                          <a:cs typeface="IBM Plex Sans" pitchFamily="34" charset="-120"/>
-                        </a:rPr>
-                        <a:t>45.8%</a:t>
-                      </a:r>
-                      <a:endParaRPr lang="en-US" sz="1400" dirty="0">
-                        <a:latin typeface="IBM Plex Sans" charset="0"/>
-                        <a:ea typeface="IBM Plex Sans" charset="0"/>
-                        <a:cs typeface="IBM Plex Sans" charset="0"/>
-                      </a:endParaRPr>
-                    </a:p>
-                  </a:txBody>
-                  <a:tcPr marL="62230" marR="62230" marT="62230" marB="62230">
-                    <a:lnL w="12700" cap="flat" cmpd="sng" algn="ctr">
-                      <a:solidFill>
-                        <a:srgbClr val="C8B8AE"/>
-                      </a:solidFill>
-                      <a:prstDash val="solid"/>
-                      <a:round/>
-                      <a:headEnd type="none" w="med" len="med"/>
-                      <a:tailEnd type="none" w="med" len="med"/>
-                    </a:lnL>
-                    <a:lnR w="12700" cap="flat" cmpd="sng" algn="ctr">
-                      <a:solidFill>
-                        <a:srgbClr val="C8B8AE"/>
-                      </a:solidFill>
-                      <a:prstDash val="solid"/>
-                      <a:round/>
-                      <a:headEnd type="none" w="med" len="med"/>
-                      <a:tailEnd type="none" w="med" len="med"/>
-                    </a:lnR>
-                    <a:lnT w="12700" cap="flat" cmpd="sng" algn="ctr">
-                      <a:solidFill>
-                        <a:srgbClr val="B6B5B1"/>
-                      </a:solidFill>
-                      <a:prstDash val="solid"/>
-                      <a:round/>
-                      <a:headEnd type="none" w="med" len="med"/>
-                      <a:tailEnd type="none" w="med" len="med"/>
-                    </a:lnT>
-                    <a:lnB w="12700" cap="flat" cmpd="sng" algn="ctr">
-                      <a:solidFill>
-                        <a:srgbClr val="C8B8AE"/>
-                      </a:solidFill>
-                      <a:prstDash val="solid"/>
-                      <a:round/>
-                      <a:headEnd type="none" w="med" len="med"/>
-                      <a:tailEnd type="none" w="med" len="med"/>
-                    </a:lnB>
-                    <a:solidFill>
-                      <a:srgbClr val="FBE6DA"/>
-                    </a:solidFill>
-                  </a:tcPr>
-                </a:tc>
-                <a:extLst>
-                  <a:ext uri="{0D108BD9-81ED-4DB2-BD59-A6C34878D82A}">
-                    <a16:rowId xmlns:a16="http://schemas.microsoft.com/office/drawing/2014/main" val="10001"/>
-                  </a:ext>
-                </a:extLst>
-              </a:tr>
-              <a:tr h="383540">
-                <a:tc>
-                  <a:txBody>
-                    <a:bodyPr/>
-                    <a:lstStyle/>
-                    <a:p>
-                      <a:pPr marL="0" indent="0">
-                        <a:lnSpc>
-                          <a:spcPts val="1960"/>
-                        </a:lnSpc>
-                        <a:buNone/>
-                      </a:pPr>
-                      <a:r>
-                        <a:rPr lang="en-US" sz="1400" dirty="0">
-                          <a:solidFill>
-                            <a:srgbClr val="14213D"/>
-                          </a:solidFill>
-                          <a:latin typeface="IBM Plex Sans" pitchFamily="34" charset="0"/>
-                          <a:ea typeface="IBM Plex Sans" pitchFamily="34" charset="-122"/>
-                          <a:cs typeface="IBM Plex Sans" pitchFamily="34" charset="-120"/>
-                        </a:rPr>
                         <a:t>HistGradientBoosting</a:t>
                       </a:r>
                       <a:endParaRPr lang="en-US" sz="1400" dirty="0">
@@ -7225,7 +6741,7 @@
                     </a:lnR>
                     <a:lnT w="12700" cap="flat" cmpd="sng" algn="ctr">
                       <a:solidFill>
-                        <a:srgbClr val="C8B8AE"/>
+                        <a:srgbClr val="B6B5B1"/>
                       </a:solidFill>
                       <a:prstDash val="solid"/>
                       <a:round/>
@@ -7241,6 +6757,12 @@
                       <a:headEnd type="none" w="med" len="med"/>
                       <a:tailEnd type="none" w="med" len="med"/>
                     </a:lnB>
+                    <a:solidFill>
+                      <a:schemeClr val="accent4">
+                        <a:lumMod val="20000"/>
+                        <a:lumOff val="80000"/>
+                      </a:schemeClr>
+                    </a:solidFill>
                   </a:tcPr>
                 </a:tc>
                 <a:tc>
@@ -7293,7 +6815,7 @@
                     </a:lnR>
                     <a:lnT w="12700" cap="flat" cmpd="sng" algn="ctr">
                       <a:solidFill>
-                        <a:srgbClr val="C8B8AE"/>
+                        <a:srgbClr val="B6B5B1"/>
                       </a:solidFill>
                       <a:prstDash val="solid"/>
                       <a:round/>
@@ -7309,6 +6831,12 @@
                       <a:headEnd type="none" w="med" len="med"/>
                       <a:tailEnd type="none" w="med" len="med"/>
                     </a:lnB>
+                    <a:solidFill>
+                      <a:schemeClr val="accent4">
+                        <a:lumMod val="20000"/>
+                        <a:lumOff val="80000"/>
+                      </a:schemeClr>
+                    </a:solidFill>
                   </a:tcPr>
                 </a:tc>
                 <a:tc>
@@ -7361,7 +6889,7 @@
                     </a:lnR>
                     <a:lnT w="12700" cap="flat" cmpd="sng" algn="ctr">
                       <a:solidFill>
-                        <a:srgbClr val="C8B8AE"/>
+                        <a:srgbClr val="B6B5B1"/>
                       </a:solidFill>
                       <a:prstDash val="solid"/>
                       <a:round/>
@@ -7377,6 +6905,12 @@
                       <a:headEnd type="none" w="med" len="med"/>
                       <a:tailEnd type="none" w="med" len="med"/>
                     </a:lnB>
+                    <a:solidFill>
+                      <a:schemeClr val="accent4">
+                        <a:lumMod val="20000"/>
+                        <a:lumOff val="80000"/>
+                      </a:schemeClr>
+                    </a:solidFill>
                   </a:tcPr>
                 </a:tc>
                 <a:tc>
@@ -7429,7 +6963,7 @@
                     </a:lnR>
                     <a:lnT w="12700" cap="flat" cmpd="sng" algn="ctr">
                       <a:solidFill>
-                        <a:srgbClr val="C8B8AE"/>
+                        <a:srgbClr val="B6B5B1"/>
                       </a:solidFill>
                       <a:prstDash val="solid"/>
                       <a:round/>
@@ -7445,6 +6979,12 @@
                       <a:headEnd type="none" w="med" len="med"/>
                       <a:tailEnd type="none" w="med" len="med"/>
                     </a:lnB>
+                    <a:solidFill>
+                      <a:schemeClr val="accent4">
+                        <a:lumMod val="20000"/>
+                        <a:lumOff val="80000"/>
+                      </a:schemeClr>
+                    </a:solidFill>
                   </a:tcPr>
                 </a:tc>
                 <a:tc>
@@ -7497,7 +7037,7 @@
                     </a:lnR>
                     <a:lnT w="12700" cap="flat" cmpd="sng" algn="ctr">
                       <a:solidFill>
-                        <a:srgbClr val="C8B8AE"/>
+                        <a:srgbClr val="B6B5B1"/>
                       </a:solidFill>
                       <a:prstDash val="solid"/>
                       <a:round/>
@@ -7513,6 +7053,12 @@
                       <a:headEnd type="none" w="med" len="med"/>
                       <a:tailEnd type="none" w="med" len="med"/>
                     </a:lnB>
+                    <a:solidFill>
+                      <a:schemeClr val="accent4">
+                        <a:lumMod val="20000"/>
+                        <a:lumOff val="80000"/>
+                      </a:schemeClr>
+                    </a:solidFill>
                   </a:tcPr>
                 </a:tc>
                 <a:extLst>

--- a/docs/The Look · Recompra a 60 días.pptx
+++ b/docs/The Look · Recompra a 60 días.pptx
@@ -5610,7 +5610,7 @@
         </p:nvSpPr>
         <p:spPr>
           <a:xfrm>
-            <a:off x="1851673" y="3312635"/>
+            <a:off x="815975" y="3331687"/>
             <a:ext cx="2520950" cy="1116330"/>
           </a:xfrm>
           <a:prstGeom prst="roundRect">
@@ -5644,7 +5644,7 @@
         </p:nvSpPr>
         <p:spPr>
           <a:xfrm>
-            <a:off x="2056778" y="3517739"/>
+            <a:off x="1021080" y="3536791"/>
             <a:ext cx="2174062" cy="254000"/>
           </a:xfrm>
           <a:prstGeom prst="rect">
@@ -5688,7 +5688,7 @@
         </p:nvSpPr>
         <p:spPr>
           <a:xfrm>
-            <a:off x="2056778" y="3797139"/>
+            <a:off x="1021080" y="3816191"/>
             <a:ext cx="2174062" cy="238760"/>
           </a:xfrm>
           <a:prstGeom prst="rect">
@@ -5732,7 +5732,7 @@
         </p:nvSpPr>
         <p:spPr>
           <a:xfrm>
-            <a:off x="4531373" y="3312635"/>
+            <a:off x="3495675" y="3331687"/>
             <a:ext cx="2520950" cy="1116330"/>
           </a:xfrm>
           <a:prstGeom prst="roundRect">
@@ -5766,7 +5766,7 @@
         </p:nvSpPr>
         <p:spPr>
           <a:xfrm>
-            <a:off x="4736478" y="3517739"/>
+            <a:off x="3700780" y="3536791"/>
             <a:ext cx="2174062" cy="254000"/>
           </a:xfrm>
           <a:prstGeom prst="rect">
@@ -5810,7 +5810,7 @@
         </p:nvSpPr>
         <p:spPr>
           <a:xfrm>
-            <a:off x="4736478" y="3797139"/>
+            <a:off x="3700780" y="3816191"/>
             <a:ext cx="2174062" cy="452120"/>
           </a:xfrm>
           <a:prstGeom prst="rect">
@@ -5854,7 +5854,7 @@
         </p:nvSpPr>
         <p:spPr>
           <a:xfrm>
-            <a:off x="7211073" y="3312635"/>
+            <a:off x="6175375" y="3331687"/>
             <a:ext cx="2520950" cy="1116330"/>
           </a:xfrm>
           <a:prstGeom prst="roundRect">
@@ -5888,7 +5888,7 @@
         </p:nvSpPr>
         <p:spPr>
           <a:xfrm>
-            <a:off x="7416178" y="3517739"/>
+            <a:off x="6380480" y="3536791"/>
             <a:ext cx="2174062" cy="254000"/>
           </a:xfrm>
           <a:prstGeom prst="rect">
@@ -5932,7 +5932,7 @@
         </p:nvSpPr>
         <p:spPr>
           <a:xfrm>
-            <a:off x="7416178" y="3797139"/>
+            <a:off x="6380480" y="3816191"/>
             <a:ext cx="2174062" cy="452120"/>
           </a:xfrm>
           <a:prstGeom prst="rect">
@@ -5963,6 +5963,128 @@
                 <a:cs typeface="IBM Plex Sans" pitchFamily="34" charset="-120"/>
               </a:rPr>
               <a:t>HistGradientBoosting y LightGBM</a:t>
+            </a:r>
+            <a:endParaRPr lang="en-US" sz="1200" dirty="0"/>
+          </a:p>
+        </p:txBody>
+      </p:sp>
+      <p:sp>
+        <p:nvSpPr>
+          <p:cNvPr id="25" name="Shape 23"/>
+          <p:cNvSpPr/>
+          <p:nvPr/>
+        </p:nvSpPr>
+        <p:spPr>
+          <a:xfrm>
+            <a:off x="8855075" y="3331687"/>
+            <a:ext cx="2520950" cy="1116330"/>
+          </a:xfrm>
+          <a:prstGeom prst="roundRect">
+            <a:avLst>
+              <a:gd name="adj" fmla="val 8817"/>
+            </a:avLst>
+          </a:prstGeom>
+          <a:solidFill>
+            <a:srgbClr val="FDFCF9"/>
+          </a:solidFill>
+          <a:ln w="6350">
+            <a:solidFill>
+              <a:srgbClr val="E3DFD5"/>
+            </a:solidFill>
+            <a:prstDash val="solid"/>
+          </a:ln>
+        </p:spPr>
+        <p:txBody>
+          <a:bodyPr/>
+          <a:lstStyle/>
+          <a:p>
+            <a:endParaRPr lang="es-PE"/>
+          </a:p>
+        </p:txBody>
+      </p:sp>
+      <p:sp>
+        <p:nvSpPr>
+          <p:cNvPr id="26" name="Text 24"/>
+          <p:cNvSpPr/>
+          <p:nvPr/>
+        </p:nvSpPr>
+        <p:spPr>
+          <a:xfrm>
+            <a:off x="9060180" y="3536791"/>
+            <a:ext cx="2174062" cy="254000"/>
+          </a:xfrm>
+          <a:prstGeom prst="rect">
+            <a:avLst/>
+          </a:prstGeom>
+          <a:noFill/>
+          <a:ln/>
+        </p:spPr>
+        <p:txBody>
+          <a:bodyPr wrap="square" lIns="0" tIns="0" rIns="0" bIns="0" rtlCol="0" anchor="t">
+            <a:normAutofit/>
+          </a:bodyPr>
+          <a:lstStyle/>
+          <a:p>
+            <a:pPr marL="0" indent="0" algn="l">
+              <a:lnSpc>
+                <a:spcPts val="1800"/>
+              </a:lnSpc>
+              <a:buNone/>
+            </a:pPr>
+            <a:r>
+              <a:rPr lang="en-US" sz="1500" b="1" dirty="0">
+                <a:solidFill>
+                  <a:srgbClr val="14213D"/>
+                </a:solidFill>
+                <a:latin typeface="IBM Plex Sans" pitchFamily="34" charset="0"/>
+                <a:ea typeface="IBM Plex Sans" pitchFamily="34" charset="-122"/>
+                <a:cs typeface="IBM Plex Sans" pitchFamily="34" charset="-120"/>
+              </a:rPr>
+              <a:t>Regla simple</a:t>
+            </a:r>
+            <a:endParaRPr lang="en-US" sz="1500" dirty="0"/>
+          </a:p>
+        </p:txBody>
+      </p:sp>
+      <p:sp>
+        <p:nvSpPr>
+          <p:cNvPr id="27" name="Text 25"/>
+          <p:cNvSpPr/>
+          <p:nvPr/>
+        </p:nvSpPr>
+        <p:spPr>
+          <a:xfrm>
+            <a:off x="9060180" y="3816191"/>
+            <a:ext cx="2174062" cy="452120"/>
+          </a:xfrm>
+          <a:prstGeom prst="rect">
+            <a:avLst/>
+          </a:prstGeom>
+          <a:noFill/>
+          <a:ln/>
+        </p:spPr>
+        <p:txBody>
+          <a:bodyPr wrap="square" lIns="0" tIns="0" rIns="0" bIns="0" rtlCol="0" anchor="t">
+            <a:normAutofit/>
+          </a:bodyPr>
+          <a:lstStyle/>
+          <a:p>
+            <a:pPr marL="0" indent="0" algn="l">
+              <a:lnSpc>
+                <a:spcPts val="1680"/>
+              </a:lnSpc>
+              <a:buNone/>
+            </a:pPr>
+            <a:r>
+              <a:rPr lang="en-US" sz="1200" dirty="0">
+                <a:solidFill>
+                  <a:srgbClr val="4A5568"/>
+                </a:solidFill>
+                <a:latin typeface="IBM Plex Sans" pitchFamily="34" charset="0"/>
+                <a:ea typeface="IBM Plex Sans" pitchFamily="34" charset="-122"/>
+                <a:cs typeface="IBM Plex Sans" pitchFamily="34" charset="-120"/>
+              </a:rPr>
+              <a:t>Ordena por días entre registro y 1.ª compra</a:t>
             </a:r>
             <a:endParaRPr lang="en-US" sz="1200" dirty="0"/>
           </a:p>
@@ -6278,14 +6400,14 @@
           <p:nvPr>
             <p:extLst>
               <p:ext uri="{D42A27DB-BD31-4B8C-83A1-F6EECF244321}">
-                <p14:modId xmlns:p14="http://schemas.microsoft.com/office/powerpoint/2010/main" val="2349596418"/>
+                <p14:modId xmlns:p14="http://schemas.microsoft.com/office/powerpoint/2010/main" val="1316153054"/>
               </p:ext>
             </p:extLst>
           </p:nvPr>
         </p:nvGraphicFramePr>
         <p:xfrm>
-          <a:off x="812800" y="2033587"/>
-          <a:ext cx="10556238" cy="2166620"/>
+          <a:off x="822960" y="1872456"/>
+          <a:ext cx="10556238" cy="2550160"/>
         </p:xfrm>
         <a:graphic>
           <a:graphicData uri="http://schemas.openxmlformats.org/drawingml/2006/table">
@@ -6711,6 +6833,368 @@
                           <a:ea typeface="IBM Plex Sans" pitchFamily="34" charset="-122"/>
                           <a:cs typeface="IBM Plex Sans" pitchFamily="34" charset="-120"/>
                         </a:rPr>
+                        <a:t>Regla simple · elegida</a:t>
+                      </a:r>
+                      <a:endParaRPr lang="en-US" sz="1400" dirty="0">
+                        <a:latin typeface="IBM Plex Sans" charset="0"/>
+                        <a:ea typeface="IBM Plex Sans" charset="0"/>
+                        <a:cs typeface="IBM Plex Sans" charset="0"/>
+                      </a:endParaRPr>
+                    </a:p>
+                  </a:txBody>
+                  <a:tcPr marL="62230" marR="62230" marT="62230" marB="62230">
+                    <a:lnL w="12700" cap="flat" cmpd="sng" algn="ctr">
+                      <a:solidFill>
+                        <a:srgbClr val="C4C3BF"/>
+                      </a:solidFill>
+                      <a:prstDash val="solid"/>
+                      <a:round/>
+                      <a:headEnd type="none" w="med" len="med"/>
+                      <a:tailEnd type="none" w="med" len="med"/>
+                    </a:lnL>
+                    <a:lnR w="12700" cap="flat" cmpd="sng" algn="ctr">
+                      <a:solidFill>
+                        <a:srgbClr val="C8B8AE"/>
+                      </a:solidFill>
+                      <a:prstDash val="solid"/>
+                      <a:round/>
+                      <a:headEnd type="none" w="med" len="med"/>
+                      <a:tailEnd type="none" w="med" len="med"/>
+                    </a:lnR>
+                    <a:lnT w="12700" cap="flat" cmpd="sng" algn="ctr">
+                      <a:solidFill>
+                        <a:srgbClr val="B6B5B1"/>
+                      </a:solidFill>
+                      <a:prstDash val="solid"/>
+                      <a:round/>
+                      <a:headEnd type="none" w="med" len="med"/>
+                      <a:tailEnd type="none" w="med" len="med"/>
+                    </a:lnT>
+                    <a:lnB w="12700" cap="flat" cmpd="sng" algn="ctr">
+                      <a:solidFill>
+                        <a:srgbClr val="C8B8AE"/>
+                      </a:solidFill>
+                      <a:prstDash val="solid"/>
+                      <a:round/>
+                      <a:headEnd type="none" w="med" len="med"/>
+                      <a:tailEnd type="none" w="med" len="med"/>
+                    </a:lnB>
+                    <a:solidFill>
+                      <a:srgbClr val="FBE6DA"/>
+                    </a:solidFill>
+                  </a:tcPr>
+                </a:tc>
+                <a:tc>
+                  <a:txBody>
+                    <a:bodyPr/>
+                    <a:lstStyle/>
+                    <a:p>
+                      <a:pPr marL="0" indent="0" algn="r">
+                        <a:lnSpc>
+                          <a:spcPts val="1960"/>
+                        </a:lnSpc>
+                        <a:buNone/>
+                      </a:pPr>
+                      <a:r>
+                        <a:rPr lang="en-US" sz="1400" dirty="0">
+                          <a:solidFill>
+                            <a:srgbClr val="14213D"/>
+                          </a:solidFill>
+                          <a:latin typeface="IBM Plex Sans" pitchFamily="34" charset="0"/>
+                          <a:ea typeface="IBM Plex Sans" pitchFamily="34" charset="-122"/>
+                          <a:cs typeface="IBM Plex Sans" pitchFamily="34" charset="-120"/>
+                        </a:rPr>
+                        <a:t>0.270</a:t>
+                      </a:r>
+                      <a:endParaRPr lang="en-US" sz="1400" dirty="0">
+                        <a:latin typeface="IBM Plex Sans" charset="0"/>
+                        <a:ea typeface="IBM Plex Sans" charset="0"/>
+                        <a:cs typeface="IBM Plex Sans" charset="0"/>
+                      </a:endParaRPr>
+                    </a:p>
+                  </a:txBody>
+                  <a:tcPr marL="62230" marR="62230" marT="62230" marB="62230">
+                    <a:lnL w="12700" cap="flat" cmpd="sng" algn="ctr">
+                      <a:solidFill>
+                        <a:srgbClr val="C8B8AE"/>
+                      </a:solidFill>
+                      <a:prstDash val="solid"/>
+                      <a:round/>
+                      <a:headEnd type="none" w="med" len="med"/>
+                      <a:tailEnd type="none" w="med" len="med"/>
+                    </a:lnL>
+                    <a:lnR w="12700" cap="flat" cmpd="sng" algn="ctr">
+                      <a:solidFill>
+                        <a:srgbClr val="C8B8AE"/>
+                      </a:solidFill>
+                      <a:prstDash val="solid"/>
+                      <a:round/>
+                      <a:headEnd type="none" w="med" len="med"/>
+                      <a:tailEnd type="none" w="med" len="med"/>
+                    </a:lnR>
+                    <a:lnT w="12700" cap="flat" cmpd="sng" algn="ctr">
+                      <a:solidFill>
+                        <a:srgbClr val="B6B5B1"/>
+                      </a:solidFill>
+                      <a:prstDash val="solid"/>
+                      <a:round/>
+                      <a:headEnd type="none" w="med" len="med"/>
+                      <a:tailEnd type="none" w="med" len="med"/>
+                    </a:lnT>
+                    <a:lnB w="12700" cap="flat" cmpd="sng" algn="ctr">
+                      <a:solidFill>
+                        <a:srgbClr val="C8B8AE"/>
+                      </a:solidFill>
+                      <a:prstDash val="solid"/>
+                      <a:round/>
+                      <a:headEnd type="none" w="med" len="med"/>
+                      <a:tailEnd type="none" w="med" len="med"/>
+                    </a:lnB>
+                    <a:solidFill>
+                      <a:srgbClr val="FBE6DA"/>
+                    </a:solidFill>
+                  </a:tcPr>
+                </a:tc>
+                <a:tc>
+                  <a:txBody>
+                    <a:bodyPr/>
+                    <a:lstStyle/>
+                    <a:p>
+                      <a:pPr marL="0" indent="0" algn="r">
+                        <a:lnSpc>
+                          <a:spcPts val="1960"/>
+                        </a:lnSpc>
+                        <a:buNone/>
+                      </a:pPr>
+                      <a:r>
+                        <a:rPr lang="en-US" sz="1400" dirty="0">
+                          <a:solidFill>
+                            <a:srgbClr val="14213D"/>
+                          </a:solidFill>
+                          <a:latin typeface="IBM Plex Sans" pitchFamily="34" charset="0"/>
+                          <a:ea typeface="IBM Plex Sans" pitchFamily="34" charset="-122"/>
+                          <a:cs typeface="IBM Plex Sans" pitchFamily="34" charset="-120"/>
+                        </a:rPr>
+                        <a:t>32.1%</a:t>
+                      </a:r>
+                      <a:endParaRPr lang="en-US" sz="1400" dirty="0">
+                        <a:latin typeface="IBM Plex Sans" charset="0"/>
+                        <a:ea typeface="IBM Plex Sans" charset="0"/>
+                        <a:cs typeface="IBM Plex Sans" charset="0"/>
+                      </a:endParaRPr>
+                    </a:p>
+                  </a:txBody>
+                  <a:tcPr marL="62230" marR="62230" marT="62230" marB="62230">
+                    <a:lnL w="12700" cap="flat" cmpd="sng" algn="ctr">
+                      <a:solidFill>
+                        <a:srgbClr val="C8B8AE"/>
+                      </a:solidFill>
+                      <a:prstDash val="solid"/>
+                      <a:round/>
+                      <a:headEnd type="none" w="med" len="med"/>
+                      <a:tailEnd type="none" w="med" len="med"/>
+                    </a:lnL>
+                    <a:lnR w="12700" cap="flat" cmpd="sng" algn="ctr">
+                      <a:solidFill>
+                        <a:srgbClr val="C8B8AE"/>
+                      </a:solidFill>
+                      <a:prstDash val="solid"/>
+                      <a:round/>
+                      <a:headEnd type="none" w="med" len="med"/>
+                      <a:tailEnd type="none" w="med" len="med"/>
+                    </a:lnR>
+                    <a:lnT w="12700" cap="flat" cmpd="sng" algn="ctr">
+                      <a:solidFill>
+                        <a:srgbClr val="B6B5B1"/>
+                      </a:solidFill>
+                      <a:prstDash val="solid"/>
+                      <a:round/>
+                      <a:headEnd type="none" w="med" len="med"/>
+                      <a:tailEnd type="none" w="med" len="med"/>
+                    </a:lnT>
+                    <a:lnB w="12700" cap="flat" cmpd="sng" algn="ctr">
+                      <a:solidFill>
+                        <a:srgbClr val="C8B8AE"/>
+                      </a:solidFill>
+                      <a:prstDash val="solid"/>
+                      <a:round/>
+                      <a:headEnd type="none" w="med" len="med"/>
+                      <a:tailEnd type="none" w="med" len="med"/>
+                    </a:lnB>
+                    <a:solidFill>
+                      <a:srgbClr val="FBE6DA"/>
+                    </a:solidFill>
+                  </a:tcPr>
+                </a:tc>
+                <a:tc>
+                  <a:txBody>
+                    <a:bodyPr/>
+                    <a:lstStyle/>
+                    <a:p>
+                      <a:pPr marL="0" indent="0" algn="r">
+                        <a:lnSpc>
+                          <a:spcPts val="1960"/>
+                        </a:lnSpc>
+                        <a:buNone/>
+                      </a:pPr>
+                      <a:r>
+                        <a:rPr lang="en-US" sz="1400" dirty="0">
+                          <a:solidFill>
+                            <a:srgbClr val="14213D"/>
+                          </a:solidFill>
+                          <a:latin typeface="IBM Plex Sans" pitchFamily="34" charset="0"/>
+                          <a:ea typeface="IBM Plex Sans" pitchFamily="34" charset="-122"/>
+                          <a:cs typeface="IBM Plex Sans" pitchFamily="34" charset="-120"/>
+                        </a:rPr>
+                        <a:t>2.5×</a:t>
+                      </a:r>
+                      <a:endParaRPr lang="en-US" sz="1400" dirty="0">
+                        <a:latin typeface="IBM Plex Sans" charset="0"/>
+                        <a:ea typeface="IBM Plex Sans" charset="0"/>
+                        <a:cs typeface="IBM Plex Sans" charset="0"/>
+                      </a:endParaRPr>
+                    </a:p>
+                  </a:txBody>
+                  <a:tcPr marL="62230" marR="62230" marT="62230" marB="62230">
+                    <a:lnL w="12700" cap="flat" cmpd="sng" algn="ctr">
+                      <a:solidFill>
+                        <a:srgbClr val="C8B8AE"/>
+                      </a:solidFill>
+                      <a:prstDash val="solid"/>
+                      <a:round/>
+                      <a:headEnd type="none" w="med" len="med"/>
+                      <a:tailEnd type="none" w="med" len="med"/>
+                    </a:lnL>
+                    <a:lnR w="12700" cap="flat" cmpd="sng" algn="ctr">
+                      <a:solidFill>
+                        <a:srgbClr val="C8B8AE"/>
+                      </a:solidFill>
+                      <a:prstDash val="solid"/>
+                      <a:round/>
+                      <a:headEnd type="none" w="med" len="med"/>
+                      <a:tailEnd type="none" w="med" len="med"/>
+                    </a:lnR>
+                    <a:lnT w="12700" cap="flat" cmpd="sng" algn="ctr">
+                      <a:solidFill>
+                        <a:srgbClr val="B6B5B1"/>
+                      </a:solidFill>
+                      <a:prstDash val="solid"/>
+                      <a:round/>
+                      <a:headEnd type="none" w="med" len="med"/>
+                      <a:tailEnd type="none" w="med" len="med"/>
+                    </a:lnT>
+                    <a:lnB w="12700" cap="flat" cmpd="sng" algn="ctr">
+                      <a:solidFill>
+                        <a:srgbClr val="C8B8AE"/>
+                      </a:solidFill>
+                      <a:prstDash val="solid"/>
+                      <a:round/>
+                      <a:headEnd type="none" w="med" len="med"/>
+                      <a:tailEnd type="none" w="med" len="med"/>
+                    </a:lnB>
+                    <a:solidFill>
+                      <a:srgbClr val="FBE6DA"/>
+                    </a:solidFill>
+                  </a:tcPr>
+                </a:tc>
+                <a:tc>
+                  <a:txBody>
+                    <a:bodyPr/>
+                    <a:lstStyle/>
+                    <a:p>
+                      <a:pPr marL="0" indent="0" algn="r">
+                        <a:lnSpc>
+                          <a:spcPts val="1960"/>
+                        </a:lnSpc>
+                        <a:buNone/>
+                      </a:pPr>
+                      <a:r>
+                        <a:rPr lang="en-US" sz="1400" dirty="0">
+                          <a:solidFill>
+                            <a:srgbClr val="14213D"/>
+                          </a:solidFill>
+                          <a:latin typeface="IBM Plex Sans" pitchFamily="34" charset="0"/>
+                          <a:ea typeface="IBM Plex Sans" pitchFamily="34" charset="-122"/>
+                          <a:cs typeface="IBM Plex Sans" pitchFamily="34" charset="-120"/>
+                        </a:rPr>
+                        <a:t>45.8%</a:t>
+                      </a:r>
+                      <a:endParaRPr lang="en-US" sz="1400" dirty="0">
+                        <a:latin typeface="IBM Plex Sans" charset="0"/>
+                        <a:ea typeface="IBM Plex Sans" charset="0"/>
+                        <a:cs typeface="IBM Plex Sans" charset="0"/>
+                      </a:endParaRPr>
+                    </a:p>
+                  </a:txBody>
+                  <a:tcPr marL="62230" marR="62230" marT="62230" marB="62230">
+                    <a:lnL w="12700" cap="flat" cmpd="sng" algn="ctr">
+                      <a:solidFill>
+                        <a:srgbClr val="C8B8AE"/>
+                      </a:solidFill>
+                      <a:prstDash val="solid"/>
+                      <a:round/>
+                      <a:headEnd type="none" w="med" len="med"/>
+                      <a:tailEnd type="none" w="med" len="med"/>
+                    </a:lnL>
+                    <a:lnR w="12700" cap="flat" cmpd="sng" algn="ctr">
+                      <a:solidFill>
+                        <a:srgbClr val="C8B8AE"/>
+                      </a:solidFill>
+                      <a:prstDash val="solid"/>
+                      <a:round/>
+                      <a:headEnd type="none" w="med" len="med"/>
+                      <a:tailEnd type="none" w="med" len="med"/>
+                    </a:lnR>
+                    <a:lnT w="12700" cap="flat" cmpd="sng" algn="ctr">
+                      <a:solidFill>
+                        <a:srgbClr val="B6B5B1"/>
+                      </a:solidFill>
+                      <a:prstDash val="solid"/>
+                      <a:round/>
+                      <a:headEnd type="none" w="med" len="med"/>
+                      <a:tailEnd type="none" w="med" len="med"/>
+                    </a:lnT>
+                    <a:lnB w="12700" cap="flat" cmpd="sng" algn="ctr">
+                      <a:solidFill>
+                        <a:srgbClr val="C8B8AE"/>
+                      </a:solidFill>
+                      <a:prstDash val="solid"/>
+                      <a:round/>
+                      <a:headEnd type="none" w="med" len="med"/>
+                      <a:tailEnd type="none" w="med" len="med"/>
+                    </a:lnB>
+                    <a:solidFill>
+                      <a:srgbClr val="FBE6DA"/>
+                    </a:solidFill>
+                  </a:tcPr>
+                </a:tc>
+                <a:extLst>
+                  <a:ext uri="{0D108BD9-81ED-4DB2-BD59-A6C34878D82A}">
+                    <a16:rowId xmlns:a16="http://schemas.microsoft.com/office/drawing/2014/main" val="10001"/>
+                  </a:ext>
+                </a:extLst>
+              </a:tr>
+              <a:tr h="383540">
+                <a:tc>
+                  <a:txBody>
+                    <a:bodyPr/>
+                    <a:lstStyle/>
+                    <a:p>
+                      <a:pPr marL="0" indent="0">
+                        <a:lnSpc>
+                          <a:spcPts val="1960"/>
+                        </a:lnSpc>
+                        <a:buNone/>
+                      </a:pPr>
+                      <a:r>
+                        <a:rPr lang="en-US" sz="1400" dirty="0">
+                          <a:solidFill>
+                            <a:srgbClr val="14213D"/>
+                          </a:solidFill>
+                          <a:latin typeface="IBM Plex Sans" pitchFamily="34" charset="0"/>
+                          <a:ea typeface="IBM Plex Sans" pitchFamily="34" charset="-122"/>
+                          <a:cs typeface="IBM Plex Sans" pitchFamily="34" charset="-120"/>
+                        </a:rPr>
                         <a:t>HistGradientBoosting</a:t>
                       </a:r>
                       <a:endParaRPr lang="en-US" sz="1400" dirty="0">
@@ -6741,7 +7225,7 @@
                     </a:lnR>
                     <a:lnT w="12700" cap="flat" cmpd="sng" algn="ctr">
                       <a:solidFill>
-                        <a:srgbClr val="B6B5B1"/>
+                        <a:srgbClr val="C8B8AE"/>
                       </a:solidFill>
                       <a:prstDash val="solid"/>
                       <a:round/>
@@ -6757,12 +7241,6 @@
                       <a:headEnd type="none" w="med" len="med"/>
                       <a:tailEnd type="none" w="med" len="med"/>
                     </a:lnB>
-                    <a:solidFill>
-                      <a:schemeClr val="accent4">
-                        <a:lumMod val="20000"/>
-                        <a:lumOff val="80000"/>
-                      </a:schemeClr>
-                    </a:solidFill>
                   </a:tcPr>
                 </a:tc>
                 <a:tc>
@@ -6815,7 +7293,7 @@
                     </a:lnR>
                     <a:lnT w="12700" cap="flat" cmpd="sng" algn="ctr">
                       <a:solidFill>
-                        <a:srgbClr val="B6B5B1"/>
+                        <a:srgbClr val="C8B8AE"/>
                       </a:solidFill>
                       <a:prstDash val="solid"/>
                       <a:round/>
@@ -6831,12 +7309,6 @@
                       <a:headEnd type="none" w="med" len="med"/>
                       <a:tailEnd type="none" w="med" len="med"/>
                     </a:lnB>
-                    <a:solidFill>
-                      <a:schemeClr val="accent4">
-                        <a:lumMod val="20000"/>
-                        <a:lumOff val="80000"/>
-                      </a:schemeClr>
-                    </a:solidFill>
                   </a:tcPr>
                 </a:tc>
                 <a:tc>
@@ -6889,7 +7361,7 @@
                     </a:lnR>
                     <a:lnT w="12700" cap="flat" cmpd="sng" algn="ctr">
                       <a:solidFill>
-                        <a:srgbClr val="B6B5B1"/>
+                        <a:srgbClr val="C8B8AE"/>
                       </a:solidFill>
                       <a:prstDash val="solid"/>
                       <a:round/>
@@ -6905,12 +7377,6 @@
                       <a:headEnd type="none" w="med" len="med"/>
                       <a:tailEnd type="none" w="med" len="med"/>
                     </a:lnB>
-                    <a:solidFill>
-                      <a:schemeClr val="accent4">
-                        <a:lumMod val="20000"/>
-                        <a:lumOff val="80000"/>
-                      </a:schemeClr>
-                    </a:solidFill>
                   </a:tcPr>
                 </a:tc>
                 <a:tc>
@@ -6963,7 +7429,7 @@
                     </a:lnR>
                     <a:lnT w="12700" cap="flat" cmpd="sng" algn="ctr">
                       <a:solidFill>
-                        <a:srgbClr val="B6B5B1"/>
+                        <a:srgbClr val="C8B8AE"/>
                       </a:solidFill>
                       <a:prstDash val="solid"/>
                       <a:round/>
@@ -6979,12 +7445,6 @@
                       <a:headEnd type="none" w="med" len="med"/>
                       <a:tailEnd type="none" w="med" len="med"/>
                     </a:lnB>
-                    <a:solidFill>
-                      <a:schemeClr val="accent4">
-                        <a:lumMod val="20000"/>
-                        <a:lumOff val="80000"/>
-                      </a:schemeClr>
-                    </a:solidFill>
                   </a:tcPr>
                 </a:tc>
                 <a:tc>
@@ -7037,7 +7497,7 @@
                     </a:lnR>
                     <a:lnT w="12700" cap="flat" cmpd="sng" algn="ctr">
                       <a:solidFill>
-                        <a:srgbClr val="B6B5B1"/>
+                        <a:srgbClr val="C8B8AE"/>
                       </a:solidFill>
                       <a:prstDash val="solid"/>
                       <a:round/>
@@ -7053,12 +7513,6 @@
                       <a:headEnd type="none" w="med" len="med"/>
                       <a:tailEnd type="none" w="med" len="med"/>
                     </a:lnB>
-                    <a:solidFill>
-                      <a:schemeClr val="accent4">
-                        <a:lumMod val="20000"/>
-                        <a:lumOff val="80000"/>
-                      </a:schemeClr>
-                    </a:solidFill>
                   </a:tcPr>
                 </a:tc>
                 <a:extLst>
